--- a/docs/presentation/BDT_Project_Presentation.pptx
+++ b/docs/presentation/BDT_Project_Presentation.pptx
@@ -284,7 +284,7 @@
       </p15:sldGuideLst>
     </p:ext>
     <p:ext uri="GoogleSlidesCustomDataVersion2">
-      <go:slidesCustomData xmlns:go="http://customooxmlschemas.google.com/" r:id="rId27" roundtripDataSignature="AMtx7mhOH/FDVj/xEECiyF6cQzYMXuQL1Q=="/>
+      <go:slidesCustomData xmlns:go="http://customooxmlschemas.google.com/" r:id="rId27" roundtripDataSignature="AMtx7mi1rJHzskVqYOjY1Xh8VTSBDZ2o3w=="/>
     </p:ext>
   </p:extLst>
 </p:presentation>
@@ -973,7 +973,7 @@
   <p:cSld>
     <p:spTree>
       <p:nvGrpSpPr>
-        <p:cNvPr id="217" name="Shape 217"/>
+        <p:cNvPr id="216" name="Shape 216"/>
         <p:cNvGrpSpPr/>
         <p:nvPr/>
       </p:nvGrpSpPr>
@@ -987,7 +987,7 @@
       </p:grpSpPr>
       <p:sp>
         <p:nvSpPr>
-          <p:cNvPr id="218" name="Google Shape;218;p10:notes"/>
+          <p:cNvPr id="217" name="Google Shape;217;p10:notes"/>
           <p:cNvSpPr txBox="1"/>
           <p:nvPr>
             <p:ph idx="1" type="body"/>
@@ -1034,7 +1034,7 @@
       </p:sp>
       <p:sp>
         <p:nvSpPr>
-          <p:cNvPr id="219" name="Google Shape;219;p10:notes"/>
+          <p:cNvPr id="218" name="Google Shape;218;p10:notes"/>
           <p:cNvSpPr/>
           <p:nvPr>
             <p:ph idx="2" type="sldImg"/>
@@ -1090,7 +1090,7 @@
   <p:cSld>
     <p:spTree>
       <p:nvGrpSpPr>
-        <p:cNvPr id="233" name="Shape 233"/>
+        <p:cNvPr id="232" name="Shape 232"/>
         <p:cNvGrpSpPr/>
         <p:nvPr/>
       </p:nvGrpSpPr>
@@ -1104,7 +1104,7 @@
       </p:grpSpPr>
       <p:sp>
         <p:nvSpPr>
-          <p:cNvPr id="234" name="Google Shape;234;p11:notes"/>
+          <p:cNvPr id="233" name="Google Shape;233;p11:notes"/>
           <p:cNvSpPr txBox="1"/>
           <p:nvPr>
             <p:ph idx="1" type="body"/>
@@ -1151,7 +1151,7 @@
       </p:sp>
       <p:sp>
         <p:nvSpPr>
-          <p:cNvPr id="235" name="Google Shape;235;p11:notes"/>
+          <p:cNvPr id="234" name="Google Shape;234;p11:notes"/>
           <p:cNvSpPr/>
           <p:nvPr>
             <p:ph idx="2" type="sldImg"/>
@@ -1207,7 +1207,7 @@
   <p:cSld>
     <p:spTree>
       <p:nvGrpSpPr>
-        <p:cNvPr id="251" name="Shape 251"/>
+        <p:cNvPr id="250" name="Shape 250"/>
         <p:cNvGrpSpPr/>
         <p:nvPr/>
       </p:nvGrpSpPr>
@@ -1221,7 +1221,7 @@
       </p:grpSpPr>
       <p:sp>
         <p:nvSpPr>
-          <p:cNvPr id="252" name="Google Shape;252;p12:notes"/>
+          <p:cNvPr id="251" name="Google Shape;251;p12:notes"/>
           <p:cNvSpPr txBox="1"/>
           <p:nvPr>
             <p:ph idx="1" type="body"/>
@@ -1268,7 +1268,7 @@
       </p:sp>
       <p:sp>
         <p:nvSpPr>
-          <p:cNvPr id="253" name="Google Shape;253;p12:notes"/>
+          <p:cNvPr id="252" name="Google Shape;252;p12:notes"/>
           <p:cNvSpPr/>
           <p:nvPr>
             <p:ph idx="2" type="sldImg"/>
@@ -1324,7 +1324,7 @@
   <p:cSld>
     <p:spTree>
       <p:nvGrpSpPr>
-        <p:cNvPr id="264" name="Shape 264"/>
+        <p:cNvPr id="263" name="Shape 263"/>
         <p:cNvGrpSpPr/>
         <p:nvPr/>
       </p:nvGrpSpPr>
@@ -1338,7 +1338,7 @@
       </p:grpSpPr>
       <p:sp>
         <p:nvSpPr>
-          <p:cNvPr id="265" name="Google Shape;265;p13:notes"/>
+          <p:cNvPr id="264" name="Google Shape;264;p13:notes"/>
           <p:cNvSpPr txBox="1"/>
           <p:nvPr>
             <p:ph idx="1" type="body"/>
@@ -1385,7 +1385,7 @@
       </p:sp>
       <p:sp>
         <p:nvSpPr>
-          <p:cNvPr id="266" name="Google Shape;266;p13:notes"/>
+          <p:cNvPr id="265" name="Google Shape;265;p13:notes"/>
           <p:cNvSpPr/>
           <p:nvPr>
             <p:ph idx="2" type="sldImg"/>
@@ -1441,7 +1441,7 @@
   <p:cSld>
     <p:spTree>
       <p:nvGrpSpPr>
-        <p:cNvPr id="280" name="Shape 280"/>
+        <p:cNvPr id="279" name="Shape 279"/>
         <p:cNvGrpSpPr/>
         <p:nvPr/>
       </p:nvGrpSpPr>
@@ -1455,7 +1455,7 @@
       </p:grpSpPr>
       <p:sp>
         <p:nvSpPr>
-          <p:cNvPr id="281" name="Google Shape;281;p14:notes"/>
+          <p:cNvPr id="280" name="Google Shape;280;p14:notes"/>
           <p:cNvSpPr txBox="1"/>
           <p:nvPr>
             <p:ph idx="1" type="body"/>
@@ -1502,7 +1502,7 @@
       </p:sp>
       <p:sp>
         <p:nvSpPr>
-          <p:cNvPr id="282" name="Google Shape;282;p14:notes"/>
+          <p:cNvPr id="281" name="Google Shape;281;p14:notes"/>
           <p:cNvSpPr/>
           <p:nvPr>
             <p:ph idx="2" type="sldImg"/>
@@ -1558,7 +1558,7 @@
   <p:cSld>
     <p:spTree>
       <p:nvGrpSpPr>
-        <p:cNvPr id="94" name="Shape 94"/>
+        <p:cNvPr id="93" name="Shape 93"/>
         <p:cNvGrpSpPr/>
         <p:nvPr/>
       </p:nvGrpSpPr>
@@ -1572,7 +1572,7 @@
       </p:grpSpPr>
       <p:sp>
         <p:nvSpPr>
-          <p:cNvPr id="95" name="Google Shape;95;p2:notes"/>
+          <p:cNvPr id="94" name="Google Shape;94;p2:notes"/>
           <p:cNvSpPr txBox="1"/>
           <p:nvPr>
             <p:ph idx="1" type="body"/>
@@ -1619,7 +1619,7 @@
       </p:sp>
       <p:sp>
         <p:nvSpPr>
-          <p:cNvPr id="96" name="Google Shape;96;p2:notes"/>
+          <p:cNvPr id="95" name="Google Shape;95;p2:notes"/>
           <p:cNvSpPr/>
           <p:nvPr>
             <p:ph idx="2" type="sldImg"/>
@@ -1675,7 +1675,7 @@
   <p:cSld>
     <p:spTree>
       <p:nvGrpSpPr>
-        <p:cNvPr id="112" name="Shape 112"/>
+        <p:cNvPr id="111" name="Shape 111"/>
         <p:cNvGrpSpPr/>
         <p:nvPr/>
       </p:nvGrpSpPr>
@@ -1689,7 +1689,7 @@
       </p:grpSpPr>
       <p:sp>
         <p:nvSpPr>
-          <p:cNvPr id="113" name="Google Shape;113;p3:notes"/>
+          <p:cNvPr id="112" name="Google Shape;112;p3:notes"/>
           <p:cNvSpPr txBox="1"/>
           <p:nvPr>
             <p:ph idx="1" type="body"/>
@@ -1736,7 +1736,7 @@
       </p:sp>
       <p:sp>
         <p:nvSpPr>
-          <p:cNvPr id="114" name="Google Shape;114;p3:notes"/>
+          <p:cNvPr id="113" name="Google Shape;113;p3:notes"/>
           <p:cNvSpPr/>
           <p:nvPr>
             <p:ph idx="2" type="sldImg"/>
@@ -1792,7 +1792,7 @@
   <p:cSld>
     <p:spTree>
       <p:nvGrpSpPr>
-        <p:cNvPr id="127" name="Shape 127"/>
+        <p:cNvPr id="126" name="Shape 126"/>
         <p:cNvGrpSpPr/>
         <p:nvPr/>
       </p:nvGrpSpPr>
@@ -1806,7 +1806,7 @@
       </p:grpSpPr>
       <p:sp>
         <p:nvSpPr>
-          <p:cNvPr id="128" name="Google Shape;128;p4:notes"/>
+          <p:cNvPr id="127" name="Google Shape;127;p4:notes"/>
           <p:cNvSpPr txBox="1"/>
           <p:nvPr>
             <p:ph idx="1" type="body"/>
@@ -1853,7 +1853,7 @@
       </p:sp>
       <p:sp>
         <p:nvSpPr>
-          <p:cNvPr id="129" name="Google Shape;129;p4:notes"/>
+          <p:cNvPr id="128" name="Google Shape;128;p4:notes"/>
           <p:cNvSpPr/>
           <p:nvPr>
             <p:ph idx="2" type="sldImg"/>
@@ -1909,7 +1909,7 @@
   <p:cSld>
     <p:spTree>
       <p:nvGrpSpPr>
-        <p:cNvPr id="143" name="Shape 143"/>
+        <p:cNvPr id="142" name="Shape 142"/>
         <p:cNvGrpSpPr/>
         <p:nvPr/>
       </p:nvGrpSpPr>
@@ -1923,7 +1923,7 @@
       </p:grpSpPr>
       <p:sp>
         <p:nvSpPr>
-          <p:cNvPr id="144" name="Google Shape;144;p5:notes"/>
+          <p:cNvPr id="143" name="Google Shape;143;p5:notes"/>
           <p:cNvSpPr txBox="1"/>
           <p:nvPr>
             <p:ph idx="1" type="body"/>
@@ -1970,7 +1970,7 @@
       </p:sp>
       <p:sp>
         <p:nvSpPr>
-          <p:cNvPr id="145" name="Google Shape;145;p5:notes"/>
+          <p:cNvPr id="144" name="Google Shape;144;p5:notes"/>
           <p:cNvSpPr/>
           <p:nvPr>
             <p:ph idx="2" type="sldImg"/>
@@ -2026,7 +2026,7 @@
   <p:cSld>
     <p:spTree>
       <p:nvGrpSpPr>
-        <p:cNvPr id="159" name="Shape 159"/>
+        <p:cNvPr id="158" name="Shape 158"/>
         <p:cNvGrpSpPr/>
         <p:nvPr/>
       </p:nvGrpSpPr>
@@ -2040,7 +2040,7 @@
       </p:grpSpPr>
       <p:sp>
         <p:nvSpPr>
-          <p:cNvPr id="160" name="Google Shape;160;p6:notes"/>
+          <p:cNvPr id="159" name="Google Shape;159;p6:notes"/>
           <p:cNvSpPr txBox="1"/>
           <p:nvPr>
             <p:ph idx="1" type="body"/>
@@ -2087,7 +2087,7 @@
       </p:sp>
       <p:sp>
         <p:nvSpPr>
-          <p:cNvPr id="161" name="Google Shape;161;p6:notes"/>
+          <p:cNvPr id="160" name="Google Shape;160;p6:notes"/>
           <p:cNvSpPr/>
           <p:nvPr>
             <p:ph idx="2" type="sldImg"/>
@@ -2143,7 +2143,7 @@
   <p:cSld>
     <p:spTree>
       <p:nvGrpSpPr>
-        <p:cNvPr id="172" name="Shape 172"/>
+        <p:cNvPr id="171" name="Shape 171"/>
         <p:cNvGrpSpPr/>
         <p:nvPr/>
       </p:nvGrpSpPr>
@@ -2157,7 +2157,7 @@
       </p:grpSpPr>
       <p:sp>
         <p:nvSpPr>
-          <p:cNvPr id="173" name="Google Shape;173;p7:notes"/>
+          <p:cNvPr id="172" name="Google Shape;172;p7:notes"/>
           <p:cNvSpPr txBox="1"/>
           <p:nvPr>
             <p:ph idx="1" type="body"/>
@@ -2204,7 +2204,7 @@
       </p:sp>
       <p:sp>
         <p:nvSpPr>
-          <p:cNvPr id="174" name="Google Shape;174;p7:notes"/>
+          <p:cNvPr id="173" name="Google Shape;173;p7:notes"/>
           <p:cNvSpPr/>
           <p:nvPr>
             <p:ph idx="2" type="sldImg"/>
@@ -2260,7 +2260,7 @@
   <p:cSld>
     <p:spTree>
       <p:nvGrpSpPr>
-        <p:cNvPr id="183" name="Shape 183"/>
+        <p:cNvPr id="182" name="Shape 182"/>
         <p:cNvGrpSpPr/>
         <p:nvPr/>
       </p:nvGrpSpPr>
@@ -2274,7 +2274,7 @@
       </p:grpSpPr>
       <p:sp>
         <p:nvSpPr>
-          <p:cNvPr id="184" name="Google Shape;184;p8:notes"/>
+          <p:cNvPr id="183" name="Google Shape;183;p8:notes"/>
           <p:cNvSpPr txBox="1"/>
           <p:nvPr>
             <p:ph idx="1" type="body"/>
@@ -2321,7 +2321,7 @@
       </p:sp>
       <p:sp>
         <p:nvSpPr>
-          <p:cNvPr id="185" name="Google Shape;185;p8:notes"/>
+          <p:cNvPr id="184" name="Google Shape;184;p8:notes"/>
           <p:cNvSpPr/>
           <p:nvPr>
             <p:ph idx="2" type="sldImg"/>
@@ -2377,7 +2377,7 @@
   <p:cSld>
     <p:spTree>
       <p:nvGrpSpPr>
-        <p:cNvPr id="200" name="Shape 200"/>
+        <p:cNvPr id="199" name="Shape 199"/>
         <p:cNvGrpSpPr/>
         <p:nvPr/>
       </p:nvGrpSpPr>
@@ -2391,7 +2391,7 @@
       </p:grpSpPr>
       <p:sp>
         <p:nvSpPr>
-          <p:cNvPr id="201" name="Google Shape;201;p9:notes"/>
+          <p:cNvPr id="200" name="Google Shape;200;p9:notes"/>
           <p:cNvSpPr txBox="1"/>
           <p:nvPr>
             <p:ph idx="1" type="body"/>
@@ -2438,7 +2438,7 @@
       </p:sp>
       <p:sp>
         <p:nvSpPr>
-          <p:cNvPr id="202" name="Google Shape;202;p9:notes"/>
+          <p:cNvPr id="201" name="Google Shape;201;p9:notes"/>
           <p:cNvSpPr/>
           <p:nvPr>
             <p:ph idx="2" type="sldImg"/>
@@ -15881,72 +15881,6 @@
         </p:nvSpPr>
         <p:spPr>
           <a:xfrm>
-            <a:off x="530352" y="530352"/>
-            <a:ext cx="1737360" cy="274320"/>
-          </a:xfrm>
-          <a:prstGeom prst="rect">
-            <a:avLst/>
-          </a:prstGeom>
-          <a:noFill/>
-          <a:ln>
-            <a:noFill/>
-          </a:ln>
-        </p:spPr>
-        <p:txBody>
-          <a:bodyPr anchorCtr="0" anchor="t" bIns="0" lIns="0" spcFirstLastPara="1" rIns="0" wrap="square" tIns="0">
-            <a:spAutoFit/>
-          </a:bodyPr>
-          <a:lstStyle/>
-          <a:p>
-            <a:pPr indent="0" lvl="0" marL="0" marR="0" rtl="0" algn="l">
-              <a:lnSpc>
-                <a:spcPct val="100000"/>
-              </a:lnSpc>
-              <a:spcBef>
-                <a:spcPts val="0"/>
-              </a:spcBef>
-              <a:spcAft>
-                <a:spcPts val="0"/>
-              </a:spcAft>
-              <a:buClr>
-                <a:srgbClr val="000000"/>
-              </a:buClr>
-              <a:buSzPts val="1100"/>
-              <a:buFont typeface="Arial"/>
-              <a:buNone/>
-            </a:pPr>
-            <a:r>
-              <a:rPr b="1" i="0" lang="en-US" sz="1100" u="none" cap="none" strike="noStrike">
-                <a:solidFill>
-                  <a:srgbClr val="187A6F"/>
-                </a:solidFill>
-                <a:latin typeface="Arial"/>
-                <a:ea typeface="Arial"/>
-                <a:cs typeface="Arial"/>
-                <a:sym typeface="Arial"/>
-              </a:rPr>
-              <a:t>BDT PROJECT TEMPLATE</a:t>
-            </a:r>
-            <a:endParaRPr b="0" i="0" sz="1400" u="none" cap="none" strike="noStrike">
-              <a:solidFill>
-                <a:srgbClr val="000000"/>
-              </a:solidFill>
-              <a:latin typeface="Arial"/>
-              <a:ea typeface="Arial"/>
-              <a:cs typeface="Arial"/>
-              <a:sym typeface="Arial"/>
-            </a:endParaRPr>
-          </a:p>
-        </p:txBody>
-      </p:sp>
-      <p:sp>
-        <p:nvSpPr>
-          <p:cNvPr id="89" name="Google Shape;89;p1"/>
-          <p:cNvSpPr txBox="1"/>
-          <p:nvPr/>
-        </p:nvSpPr>
-        <p:spPr>
-          <a:xfrm>
             <a:off x="530352" y="896112"/>
             <a:ext cx="5394900" cy="923400"/>
           </a:xfrm>
@@ -16007,7 +15941,7 @@
       </p:sp>
       <p:sp>
         <p:nvSpPr>
-          <p:cNvPr id="90" name="Google Shape;90;p1"/>
+          <p:cNvPr id="89" name="Google Shape;89;p1"/>
           <p:cNvSpPr txBox="1"/>
           <p:nvPr/>
         </p:nvSpPr>
@@ -16229,7 +16163,7 @@
       </p:sp>
       <p:sp>
         <p:nvSpPr>
-          <p:cNvPr id="91" name="Google Shape;91;p1"/>
+          <p:cNvPr id="90" name="Google Shape;90;p1"/>
           <p:cNvSpPr txBox="1"/>
           <p:nvPr/>
         </p:nvSpPr>
@@ -16295,7 +16229,7 @@
       </p:sp>
       <p:sp>
         <p:nvSpPr>
-          <p:cNvPr id="92" name="Google Shape;92;p1"/>
+          <p:cNvPr id="91" name="Google Shape;91;p1"/>
           <p:cNvSpPr txBox="1"/>
           <p:nvPr/>
         </p:nvSpPr>
@@ -16392,7 +16326,7 @@
       </p:sp>
       <p:sp>
         <p:nvSpPr>
-          <p:cNvPr id="93" name="Google Shape;93;p1"/>
+          <p:cNvPr id="92" name="Google Shape;92;p1"/>
           <p:cNvSpPr txBox="1"/>
           <p:nvPr/>
         </p:nvSpPr>
@@ -16468,7 +16402,7 @@
     </p:bg>
     <p:spTree>
       <p:nvGrpSpPr>
-        <p:cNvPr id="220" name="Shape 220"/>
+        <p:cNvPr id="219" name="Shape 219"/>
         <p:cNvGrpSpPr/>
         <p:nvPr/>
       </p:nvGrpSpPr>
@@ -16482,7 +16416,7 @@
       </p:grpSpPr>
       <p:sp>
         <p:nvSpPr>
-          <p:cNvPr id="221" name="Google Shape;221;p10"/>
+          <p:cNvPr id="220" name="Google Shape;220;p10"/>
           <p:cNvSpPr/>
           <p:nvPr/>
         </p:nvSpPr>
@@ -16548,7 +16482,7 @@
       </p:sp>
       <p:sp>
         <p:nvSpPr>
-          <p:cNvPr id="222" name="Google Shape;222;p10"/>
+          <p:cNvPr id="221" name="Google Shape;221;p10"/>
           <p:cNvSpPr/>
           <p:nvPr/>
         </p:nvSpPr>
@@ -16614,7 +16548,7 @@
       </p:sp>
       <p:sp>
         <p:nvSpPr>
-          <p:cNvPr id="223" name="Google Shape;223;p10"/>
+          <p:cNvPr id="222" name="Google Shape;222;p10"/>
           <p:cNvSpPr/>
           <p:nvPr/>
         </p:nvSpPr>
@@ -16680,7 +16614,7 @@
       </p:sp>
       <p:sp>
         <p:nvSpPr>
-          <p:cNvPr id="224" name="Google Shape;224;p10"/>
+          <p:cNvPr id="223" name="Google Shape;223;p10"/>
           <p:cNvSpPr/>
           <p:nvPr/>
         </p:nvSpPr>
@@ -16757,7 +16691,7 @@
       </p:sp>
       <p:sp>
         <p:nvSpPr>
-          <p:cNvPr id="225" name="Google Shape;225;p10"/>
+          <p:cNvPr id="224" name="Google Shape;224;p10"/>
           <p:cNvSpPr txBox="1"/>
           <p:nvPr/>
         </p:nvSpPr>
@@ -16823,7 +16757,7 @@
       </p:sp>
       <p:sp>
         <p:nvSpPr>
-          <p:cNvPr id="226" name="Google Shape;226;p10"/>
+          <p:cNvPr id="225" name="Google Shape;225;p10"/>
           <p:cNvSpPr txBox="1"/>
           <p:nvPr/>
         </p:nvSpPr>
@@ -16889,7 +16823,7 @@
       </p:sp>
       <p:sp>
         <p:nvSpPr>
-          <p:cNvPr id="227" name="Google Shape;227;p10"/>
+          <p:cNvPr id="226" name="Google Shape;226;p10"/>
           <p:cNvSpPr/>
           <p:nvPr/>
         </p:nvSpPr>
@@ -16963,7 +16897,7 @@
       </p:sp>
       <p:sp>
         <p:nvSpPr>
-          <p:cNvPr id="228" name="Google Shape;228;p10"/>
+          <p:cNvPr id="227" name="Google Shape;227;p10"/>
           <p:cNvSpPr/>
           <p:nvPr/>
         </p:nvSpPr>
@@ -17037,7 +16971,7 @@
       </p:sp>
       <p:sp>
         <p:nvSpPr>
-          <p:cNvPr id="229" name="Google Shape;229;p10"/>
+          <p:cNvPr id="228" name="Google Shape;228;p10"/>
           <p:cNvSpPr/>
           <p:nvPr/>
         </p:nvSpPr>
@@ -17103,7 +17037,7 @@
       </p:sp>
       <p:sp>
         <p:nvSpPr>
-          <p:cNvPr id="230" name="Google Shape;230;p10"/>
+          <p:cNvPr id="229" name="Google Shape;229;p10"/>
           <p:cNvSpPr txBox="1"/>
           <p:nvPr/>
         </p:nvSpPr>
@@ -17169,7 +17103,7 @@
       </p:sp>
       <p:graphicFrame>
         <p:nvGraphicFramePr>
-          <p:cNvPr id="231" name="Google Shape;231;p10"/>
+          <p:cNvPr id="230" name="Google Shape;230;p10"/>
           <p:cNvGraphicFramePr/>
           <p:nvPr/>
         </p:nvGraphicFramePr>
@@ -17182,7 +17116,7 @@
             <a:tbl>
               <a:tblPr>
                 <a:noFill/>
-                <a:tableStyleId>{E6D533FE-FD2F-4370-B4F4-59EF0C205012}</a:tableStyleId>
+                <a:tableStyleId>{3D4FFB22-3C65-4DAF-B08D-F1B4F6C1D308}</a:tableStyleId>
               </a:tblPr>
               <a:tblGrid>
                 <a:gridCol w="5326075"/>
@@ -17552,7 +17486,7 @@
       </p:graphicFrame>
       <p:sp>
         <p:nvSpPr>
-          <p:cNvPr id="232" name="Google Shape;232;p10"/>
+          <p:cNvPr id="231" name="Google Shape;231;p10"/>
           <p:cNvSpPr txBox="1"/>
           <p:nvPr/>
         </p:nvSpPr>
@@ -17761,7 +17695,7 @@
     </p:bg>
     <p:spTree>
       <p:nvGrpSpPr>
-        <p:cNvPr id="236" name="Shape 236"/>
+        <p:cNvPr id="235" name="Shape 235"/>
         <p:cNvGrpSpPr/>
         <p:nvPr/>
       </p:nvGrpSpPr>
@@ -17775,7 +17709,7 @@
       </p:grpSpPr>
       <p:sp>
         <p:nvSpPr>
-          <p:cNvPr id="237" name="Google Shape;237;p11"/>
+          <p:cNvPr id="236" name="Google Shape;236;p11"/>
           <p:cNvSpPr/>
           <p:nvPr/>
         </p:nvSpPr>
@@ -17841,7 +17775,7 @@
       </p:sp>
       <p:sp>
         <p:nvSpPr>
-          <p:cNvPr id="238" name="Google Shape;238;p11"/>
+          <p:cNvPr id="237" name="Google Shape;237;p11"/>
           <p:cNvSpPr/>
           <p:nvPr/>
         </p:nvSpPr>
@@ -17907,7 +17841,7 @@
       </p:sp>
       <p:sp>
         <p:nvSpPr>
-          <p:cNvPr id="239" name="Google Shape;239;p11"/>
+          <p:cNvPr id="238" name="Google Shape;238;p11"/>
           <p:cNvSpPr/>
           <p:nvPr/>
         </p:nvSpPr>
@@ -17973,7 +17907,7 @@
       </p:sp>
       <p:sp>
         <p:nvSpPr>
-          <p:cNvPr id="240" name="Google Shape;240;p11"/>
+          <p:cNvPr id="239" name="Google Shape;239;p11"/>
           <p:cNvSpPr/>
           <p:nvPr/>
         </p:nvSpPr>
@@ -18050,7 +17984,7 @@
       </p:sp>
       <p:sp>
         <p:nvSpPr>
-          <p:cNvPr id="241" name="Google Shape;241;p11"/>
+          <p:cNvPr id="240" name="Google Shape;240;p11"/>
           <p:cNvSpPr txBox="1"/>
           <p:nvPr/>
         </p:nvSpPr>
@@ -18116,7 +18050,7 @@
       </p:sp>
       <p:sp>
         <p:nvSpPr>
-          <p:cNvPr id="242" name="Google Shape;242;p11"/>
+          <p:cNvPr id="241" name="Google Shape;241;p11"/>
           <p:cNvSpPr txBox="1"/>
           <p:nvPr/>
         </p:nvSpPr>
@@ -18182,7 +18116,7 @@
       </p:sp>
       <p:sp>
         <p:nvSpPr>
-          <p:cNvPr id="243" name="Google Shape;243;p11"/>
+          <p:cNvPr id="242" name="Google Shape;242;p11"/>
           <p:cNvSpPr/>
           <p:nvPr/>
         </p:nvSpPr>
@@ -18256,7 +18190,7 @@
       </p:sp>
       <p:sp>
         <p:nvSpPr>
-          <p:cNvPr id="244" name="Google Shape;244;p11"/>
+          <p:cNvPr id="243" name="Google Shape;243;p11"/>
           <p:cNvSpPr/>
           <p:nvPr/>
         </p:nvSpPr>
@@ -18330,7 +18264,7 @@
       </p:sp>
       <p:sp>
         <p:nvSpPr>
-          <p:cNvPr id="245" name="Google Shape;245;p11"/>
+          <p:cNvPr id="244" name="Google Shape;244;p11"/>
           <p:cNvSpPr/>
           <p:nvPr/>
         </p:nvSpPr>
@@ -18396,7 +18330,7 @@
       </p:sp>
       <p:sp>
         <p:nvSpPr>
-          <p:cNvPr id="246" name="Google Shape;246;p11"/>
+          <p:cNvPr id="245" name="Google Shape;245;p11"/>
           <p:cNvSpPr txBox="1"/>
           <p:nvPr/>
         </p:nvSpPr>
@@ -18462,7 +18396,7 @@
       </p:sp>
       <p:sp>
         <p:nvSpPr>
-          <p:cNvPr id="247" name="Google Shape;247;p11"/>
+          <p:cNvPr id="246" name="Google Shape;246;p11"/>
           <p:cNvSpPr txBox="1"/>
           <p:nvPr/>
         </p:nvSpPr>
@@ -18528,7 +18462,7 @@
       </p:sp>
       <p:sp>
         <p:nvSpPr>
-          <p:cNvPr id="248" name="Google Shape;248;p11"/>
+          <p:cNvPr id="247" name="Google Shape;247;p11"/>
           <p:cNvSpPr txBox="1"/>
           <p:nvPr/>
         </p:nvSpPr>
@@ -18858,7 +18792,7 @@
       </p:sp>
       <p:sp>
         <p:nvSpPr>
-          <p:cNvPr id="249" name="Google Shape;249;p11"/>
+          <p:cNvPr id="248" name="Google Shape;248;p11"/>
           <p:cNvSpPr txBox="1"/>
           <p:nvPr/>
         </p:nvSpPr>
@@ -18916,7 +18850,7 @@
       </p:sp>
       <p:pic>
         <p:nvPicPr>
-          <p:cNvPr id="250" name="Google Shape;250;p11" title="newplot (2).png"/>
+          <p:cNvPr id="249" name="Google Shape;249;p11" title="newplot (2).png"/>
           <p:cNvPicPr preferRelativeResize="0"/>
           <p:nvPr/>
         </p:nvPicPr>
@@ -18977,7 +18911,7 @@
     </p:bg>
     <p:spTree>
       <p:nvGrpSpPr>
-        <p:cNvPr id="254" name="Shape 254"/>
+        <p:cNvPr id="253" name="Shape 253"/>
         <p:cNvGrpSpPr/>
         <p:nvPr/>
       </p:nvGrpSpPr>
@@ -18991,7 +18925,7 @@
       </p:grpSpPr>
       <p:sp>
         <p:nvSpPr>
-          <p:cNvPr id="255" name="Google Shape;255;p12"/>
+          <p:cNvPr id="254" name="Google Shape;254;p12"/>
           <p:cNvSpPr/>
           <p:nvPr/>
         </p:nvSpPr>
@@ -19057,7 +18991,7 @@
       </p:sp>
       <p:sp>
         <p:nvSpPr>
-          <p:cNvPr id="256" name="Google Shape;256;p12"/>
+          <p:cNvPr id="255" name="Google Shape;255;p12"/>
           <p:cNvSpPr/>
           <p:nvPr/>
         </p:nvSpPr>
@@ -19123,7 +19057,7 @@
       </p:sp>
       <p:sp>
         <p:nvSpPr>
-          <p:cNvPr id="257" name="Google Shape;257;p12"/>
+          <p:cNvPr id="256" name="Google Shape;256;p12"/>
           <p:cNvSpPr/>
           <p:nvPr/>
         </p:nvSpPr>
@@ -19189,7 +19123,7 @@
       </p:sp>
       <p:sp>
         <p:nvSpPr>
-          <p:cNvPr id="258" name="Google Shape;258;p12"/>
+          <p:cNvPr id="257" name="Google Shape;257;p12"/>
           <p:cNvSpPr/>
           <p:nvPr/>
         </p:nvSpPr>
@@ -19266,7 +19200,7 @@
       </p:sp>
       <p:sp>
         <p:nvSpPr>
-          <p:cNvPr id="259" name="Google Shape;259;p12"/>
+          <p:cNvPr id="258" name="Google Shape;258;p12"/>
           <p:cNvSpPr txBox="1"/>
           <p:nvPr/>
         </p:nvSpPr>
@@ -19332,7 +19266,7 @@
       </p:sp>
       <p:sp>
         <p:nvSpPr>
-          <p:cNvPr id="260" name="Google Shape;260;p12"/>
+          <p:cNvPr id="259" name="Google Shape;259;p12"/>
           <p:cNvSpPr/>
           <p:nvPr/>
         </p:nvSpPr>
@@ -19406,7 +19340,7 @@
       </p:sp>
       <p:sp>
         <p:nvSpPr>
-          <p:cNvPr id="261" name="Google Shape;261;p12"/>
+          <p:cNvPr id="260" name="Google Shape;260;p12"/>
           <p:cNvSpPr txBox="1"/>
           <p:nvPr/>
         </p:nvSpPr>
@@ -19755,7 +19689,7 @@
       </p:sp>
       <p:sp>
         <p:nvSpPr>
-          <p:cNvPr id="262" name="Google Shape;262;p12"/>
+          <p:cNvPr id="261" name="Google Shape;261;p12"/>
           <p:cNvSpPr txBox="1"/>
           <p:nvPr/>
         </p:nvSpPr>
@@ -19821,7 +19755,7 @@
       </p:sp>
       <p:pic>
         <p:nvPicPr>
-          <p:cNvPr id="263" name="Google Shape;263;p12"/>
+          <p:cNvPr id="262" name="Google Shape;262;p12"/>
           <p:cNvPicPr preferRelativeResize="0"/>
           <p:nvPr/>
         </p:nvPicPr>
@@ -19867,7 +19801,7 @@
     </p:bg>
     <p:spTree>
       <p:nvGrpSpPr>
-        <p:cNvPr id="267" name="Shape 267"/>
+        <p:cNvPr id="266" name="Shape 266"/>
         <p:cNvGrpSpPr/>
         <p:nvPr/>
       </p:nvGrpSpPr>
@@ -19881,7 +19815,7 @@
       </p:grpSpPr>
       <p:sp>
         <p:nvSpPr>
-          <p:cNvPr id="268" name="Google Shape;268;p13"/>
+          <p:cNvPr id="267" name="Google Shape;267;p13"/>
           <p:cNvSpPr/>
           <p:nvPr/>
         </p:nvSpPr>
@@ -19947,7 +19881,7 @@
       </p:sp>
       <p:sp>
         <p:nvSpPr>
-          <p:cNvPr id="269" name="Google Shape;269;p13"/>
+          <p:cNvPr id="268" name="Google Shape;268;p13"/>
           <p:cNvSpPr/>
           <p:nvPr/>
         </p:nvSpPr>
@@ -20013,7 +19947,7 @@
       </p:sp>
       <p:sp>
         <p:nvSpPr>
-          <p:cNvPr id="270" name="Google Shape;270;p13"/>
+          <p:cNvPr id="269" name="Google Shape;269;p13"/>
           <p:cNvSpPr/>
           <p:nvPr/>
         </p:nvSpPr>
@@ -20079,7 +20013,7 @@
       </p:sp>
       <p:sp>
         <p:nvSpPr>
-          <p:cNvPr id="271" name="Google Shape;271;p13"/>
+          <p:cNvPr id="270" name="Google Shape;270;p13"/>
           <p:cNvSpPr/>
           <p:nvPr/>
         </p:nvSpPr>
@@ -20156,7 +20090,7 @@
       </p:sp>
       <p:sp>
         <p:nvSpPr>
-          <p:cNvPr id="272" name="Google Shape;272;p13"/>
+          <p:cNvPr id="271" name="Google Shape;271;p13"/>
           <p:cNvSpPr txBox="1"/>
           <p:nvPr/>
         </p:nvSpPr>
@@ -20222,7 +20156,7 @@
       </p:sp>
       <p:sp>
         <p:nvSpPr>
-          <p:cNvPr id="273" name="Google Shape;273;p13"/>
+          <p:cNvPr id="272" name="Google Shape;272;p13"/>
           <p:cNvSpPr txBox="1"/>
           <p:nvPr/>
         </p:nvSpPr>
@@ -20288,7 +20222,7 @@
       </p:sp>
       <p:sp>
         <p:nvSpPr>
-          <p:cNvPr id="274" name="Google Shape;274;p13"/>
+          <p:cNvPr id="273" name="Google Shape;273;p13"/>
           <p:cNvSpPr/>
           <p:nvPr/>
         </p:nvSpPr>
@@ -20362,7 +20296,7 @@
       </p:sp>
       <p:sp>
         <p:nvSpPr>
-          <p:cNvPr id="275" name="Google Shape;275;p13"/>
+          <p:cNvPr id="274" name="Google Shape;274;p13"/>
           <p:cNvSpPr/>
           <p:nvPr/>
         </p:nvSpPr>
@@ -20436,7 +20370,7 @@
       </p:sp>
       <p:sp>
         <p:nvSpPr>
-          <p:cNvPr id="276" name="Google Shape;276;p13"/>
+          <p:cNvPr id="275" name="Google Shape;275;p13"/>
           <p:cNvSpPr/>
           <p:nvPr/>
         </p:nvSpPr>
@@ -20502,7 +20436,7 @@
       </p:sp>
       <p:sp>
         <p:nvSpPr>
-          <p:cNvPr id="277" name="Google Shape;277;p13"/>
+          <p:cNvPr id="276" name="Google Shape;276;p13"/>
           <p:cNvSpPr txBox="1"/>
           <p:nvPr/>
         </p:nvSpPr>
@@ -20568,7 +20502,7 @@
       </p:sp>
       <p:sp>
         <p:nvSpPr>
-          <p:cNvPr id="278" name="Google Shape;278;p13"/>
+          <p:cNvPr id="277" name="Google Shape;277;p13"/>
           <p:cNvSpPr txBox="1"/>
           <p:nvPr/>
         </p:nvSpPr>
@@ -20964,7 +20898,7 @@
       </p:sp>
       <p:sp>
         <p:nvSpPr>
-          <p:cNvPr id="279" name="Google Shape;279;p13"/>
+          <p:cNvPr id="278" name="Google Shape;278;p13"/>
           <p:cNvSpPr txBox="1"/>
           <p:nvPr/>
         </p:nvSpPr>
@@ -21206,7 +21140,7 @@
     </p:bg>
     <p:spTree>
       <p:nvGrpSpPr>
-        <p:cNvPr id="283" name="Shape 283"/>
+        <p:cNvPr id="282" name="Shape 282"/>
         <p:cNvGrpSpPr/>
         <p:nvPr/>
       </p:nvGrpSpPr>
@@ -21220,7 +21154,7 @@
       </p:grpSpPr>
       <p:sp>
         <p:nvSpPr>
-          <p:cNvPr id="284" name="Google Shape;284;p14"/>
+          <p:cNvPr id="283" name="Google Shape;283;p14"/>
           <p:cNvSpPr/>
           <p:nvPr/>
         </p:nvSpPr>
@@ -21286,7 +21220,7 @@
       </p:sp>
       <p:sp>
         <p:nvSpPr>
-          <p:cNvPr id="285" name="Google Shape;285;p14"/>
+          <p:cNvPr id="284" name="Google Shape;284;p14"/>
           <p:cNvSpPr/>
           <p:nvPr/>
         </p:nvSpPr>
@@ -21352,7 +21286,7 @@
       </p:sp>
       <p:sp>
         <p:nvSpPr>
-          <p:cNvPr id="286" name="Google Shape;286;p14"/>
+          <p:cNvPr id="285" name="Google Shape;285;p14"/>
           <p:cNvSpPr/>
           <p:nvPr/>
         </p:nvSpPr>
@@ -21418,7 +21352,7 @@
       </p:sp>
       <p:sp>
         <p:nvSpPr>
-          <p:cNvPr id="287" name="Google Shape;287;p14"/>
+          <p:cNvPr id="286" name="Google Shape;286;p14"/>
           <p:cNvSpPr/>
           <p:nvPr/>
         </p:nvSpPr>
@@ -21495,7 +21429,7 @@
       </p:sp>
       <p:sp>
         <p:nvSpPr>
-          <p:cNvPr id="288" name="Google Shape;288;p14"/>
+          <p:cNvPr id="287" name="Google Shape;287;p14"/>
           <p:cNvSpPr txBox="1"/>
           <p:nvPr/>
         </p:nvSpPr>
@@ -21561,7 +21495,7 @@
       </p:sp>
       <p:sp>
         <p:nvSpPr>
-          <p:cNvPr id="289" name="Google Shape;289;p14"/>
+          <p:cNvPr id="288" name="Google Shape;288;p14"/>
           <p:cNvSpPr txBox="1"/>
           <p:nvPr/>
         </p:nvSpPr>
@@ -21627,7 +21561,7 @@
       </p:sp>
       <p:sp>
         <p:nvSpPr>
-          <p:cNvPr id="290" name="Google Shape;290;p14"/>
+          <p:cNvPr id="289" name="Google Shape;289;p14"/>
           <p:cNvSpPr/>
           <p:nvPr/>
         </p:nvSpPr>
@@ -21701,7 +21635,7 @@
       </p:sp>
       <p:sp>
         <p:nvSpPr>
-          <p:cNvPr id="291" name="Google Shape;291;p14"/>
+          <p:cNvPr id="290" name="Google Shape;290;p14"/>
           <p:cNvSpPr/>
           <p:nvPr/>
         </p:nvSpPr>
@@ -21775,7 +21709,7 @@
       </p:sp>
       <p:sp>
         <p:nvSpPr>
-          <p:cNvPr id="292" name="Google Shape;292;p14"/>
+          <p:cNvPr id="291" name="Google Shape;291;p14"/>
           <p:cNvSpPr/>
           <p:nvPr/>
         </p:nvSpPr>
@@ -21841,7 +21775,7 @@
       </p:sp>
       <p:sp>
         <p:nvSpPr>
-          <p:cNvPr id="293" name="Google Shape;293;p14"/>
+          <p:cNvPr id="292" name="Google Shape;292;p14"/>
           <p:cNvSpPr txBox="1"/>
           <p:nvPr/>
         </p:nvSpPr>
@@ -21898,7 +21832,7 @@
       </p:sp>
       <p:sp>
         <p:nvSpPr>
-          <p:cNvPr id="294" name="Google Shape;294;p14"/>
+          <p:cNvPr id="293" name="Google Shape;293;p14"/>
           <p:cNvSpPr txBox="1"/>
           <p:nvPr/>
         </p:nvSpPr>
@@ -21964,7 +21898,7 @@
       </p:sp>
       <p:sp>
         <p:nvSpPr>
-          <p:cNvPr id="295" name="Google Shape;295;p14"/>
+          <p:cNvPr id="294" name="Google Shape;294;p14"/>
           <p:cNvSpPr txBox="1"/>
           <p:nvPr/>
         </p:nvSpPr>
@@ -22463,7 +22397,7 @@
       </p:sp>
       <p:sp>
         <p:nvSpPr>
-          <p:cNvPr id="296" name="Google Shape;296;p14"/>
+          <p:cNvPr id="295" name="Google Shape;295;p14"/>
           <p:cNvSpPr txBox="1"/>
           <p:nvPr/>
         </p:nvSpPr>
@@ -22792,7 +22726,7 @@
     </p:bg>
     <p:spTree>
       <p:nvGrpSpPr>
-        <p:cNvPr id="97" name="Shape 97"/>
+        <p:cNvPr id="96" name="Shape 96"/>
         <p:cNvGrpSpPr/>
         <p:nvPr/>
       </p:nvGrpSpPr>
@@ -22806,7 +22740,7 @@
       </p:grpSpPr>
       <p:sp>
         <p:nvSpPr>
-          <p:cNvPr id="98" name="Google Shape;98;p2"/>
+          <p:cNvPr id="97" name="Google Shape;97;p2"/>
           <p:cNvSpPr/>
           <p:nvPr/>
         </p:nvSpPr>
@@ -22872,7 +22806,7 @@
       </p:sp>
       <p:sp>
         <p:nvSpPr>
-          <p:cNvPr id="99" name="Google Shape;99;p2"/>
+          <p:cNvPr id="98" name="Google Shape;98;p2"/>
           <p:cNvSpPr/>
           <p:nvPr/>
         </p:nvSpPr>
@@ -22938,7 +22872,7 @@
       </p:sp>
       <p:sp>
         <p:nvSpPr>
-          <p:cNvPr id="100" name="Google Shape;100;p2"/>
+          <p:cNvPr id="99" name="Google Shape;99;p2"/>
           <p:cNvSpPr/>
           <p:nvPr/>
         </p:nvSpPr>
@@ -23004,7 +22938,7 @@
       </p:sp>
       <p:sp>
         <p:nvSpPr>
-          <p:cNvPr id="101" name="Google Shape;101;p2"/>
+          <p:cNvPr id="100" name="Google Shape;100;p2"/>
           <p:cNvSpPr/>
           <p:nvPr/>
         </p:nvSpPr>
@@ -23081,7 +23015,7 @@
       </p:sp>
       <p:sp>
         <p:nvSpPr>
-          <p:cNvPr id="102" name="Google Shape;102;p2"/>
+          <p:cNvPr id="101" name="Google Shape;101;p2"/>
           <p:cNvSpPr txBox="1"/>
           <p:nvPr/>
         </p:nvSpPr>
@@ -23147,7 +23081,7 @@
       </p:sp>
       <p:sp>
         <p:nvSpPr>
-          <p:cNvPr id="103" name="Google Shape;103;p2"/>
+          <p:cNvPr id="102" name="Google Shape;102;p2"/>
           <p:cNvSpPr txBox="1"/>
           <p:nvPr/>
         </p:nvSpPr>
@@ -23213,7 +23147,7 @@
       </p:sp>
       <p:sp>
         <p:nvSpPr>
-          <p:cNvPr id="104" name="Google Shape;104;p2"/>
+          <p:cNvPr id="103" name="Google Shape;103;p2"/>
           <p:cNvSpPr/>
           <p:nvPr/>
         </p:nvSpPr>
@@ -23287,7 +23221,7 @@
       </p:sp>
       <p:sp>
         <p:nvSpPr>
-          <p:cNvPr id="105" name="Google Shape;105;p2"/>
+          <p:cNvPr id="104" name="Google Shape;104;p2"/>
           <p:cNvSpPr/>
           <p:nvPr/>
         </p:nvSpPr>
@@ -23361,7 +23295,7 @@
       </p:sp>
       <p:sp>
         <p:nvSpPr>
-          <p:cNvPr id="106" name="Google Shape;106;p2"/>
+          <p:cNvPr id="105" name="Google Shape;105;p2"/>
           <p:cNvSpPr/>
           <p:nvPr/>
         </p:nvSpPr>
@@ -23459,7 +23393,7 @@
       </p:sp>
       <p:sp>
         <p:nvSpPr>
-          <p:cNvPr id="107" name="Google Shape;107;p2"/>
+          <p:cNvPr id="106" name="Google Shape;106;p2"/>
           <p:cNvSpPr txBox="1"/>
           <p:nvPr/>
         </p:nvSpPr>
@@ -23525,7 +23459,7 @@
       </p:sp>
       <p:sp>
         <p:nvSpPr>
-          <p:cNvPr id="108" name="Google Shape;108;p2"/>
+          <p:cNvPr id="107" name="Google Shape;107;p2"/>
           <p:cNvSpPr txBox="1"/>
           <p:nvPr/>
         </p:nvSpPr>
@@ -23591,7 +23525,7 @@
       </p:sp>
       <p:sp>
         <p:nvSpPr>
-          <p:cNvPr id="109" name="Google Shape;109;p2"/>
+          <p:cNvPr id="108" name="Google Shape;108;p2"/>
           <p:cNvSpPr txBox="1"/>
           <p:nvPr/>
         </p:nvSpPr>
@@ -23782,7 +23716,7 @@
       </p:sp>
       <p:graphicFrame>
         <p:nvGraphicFramePr>
-          <p:cNvPr id="110" name="Google Shape;110;p2"/>
+          <p:cNvPr id="109" name="Google Shape;109;p2"/>
           <p:cNvGraphicFramePr/>
           <p:nvPr/>
         </p:nvGraphicFramePr>
@@ -23795,7 +23729,7 @@
             <a:tbl>
               <a:tblPr>
                 <a:noFill/>
-                <a:tableStyleId>{E6D533FE-FD2F-4370-B4F4-59EF0C205012}</a:tableStyleId>
+                <a:tableStyleId>{3D4FFB22-3C65-4DAF-B08D-F1B4F6C1D308}</a:tableStyleId>
               </a:tblPr>
               <a:tblGrid>
                 <a:gridCol w="1730375"/>
@@ -24212,7 +24146,7 @@
       </p:graphicFrame>
       <p:sp>
         <p:nvSpPr>
-          <p:cNvPr id="111" name="Google Shape;111;p2"/>
+          <p:cNvPr id="110" name="Google Shape;110;p2"/>
           <p:cNvSpPr txBox="1"/>
           <p:nvPr/>
         </p:nvSpPr>
@@ -24508,7 +24442,7 @@
     </p:bg>
     <p:spTree>
       <p:nvGrpSpPr>
-        <p:cNvPr id="115" name="Shape 115"/>
+        <p:cNvPr id="114" name="Shape 114"/>
         <p:cNvGrpSpPr/>
         <p:nvPr/>
       </p:nvGrpSpPr>
@@ -24522,7 +24456,7 @@
       </p:grpSpPr>
       <p:sp>
         <p:nvSpPr>
-          <p:cNvPr id="116" name="Google Shape;116;p3"/>
+          <p:cNvPr id="115" name="Google Shape;115;p3"/>
           <p:cNvSpPr/>
           <p:nvPr/>
         </p:nvSpPr>
@@ -24588,7 +24522,7 @@
       </p:sp>
       <p:sp>
         <p:nvSpPr>
-          <p:cNvPr id="117" name="Google Shape;117;p3"/>
+          <p:cNvPr id="116" name="Google Shape;116;p3"/>
           <p:cNvSpPr/>
           <p:nvPr/>
         </p:nvSpPr>
@@ -24654,7 +24588,7 @@
       </p:sp>
       <p:sp>
         <p:nvSpPr>
-          <p:cNvPr id="118" name="Google Shape;118;p3"/>
+          <p:cNvPr id="117" name="Google Shape;117;p3"/>
           <p:cNvSpPr/>
           <p:nvPr/>
         </p:nvSpPr>
@@ -24720,7 +24654,7 @@
       </p:sp>
       <p:sp>
         <p:nvSpPr>
-          <p:cNvPr id="119" name="Google Shape;119;p3"/>
+          <p:cNvPr id="118" name="Google Shape;118;p3"/>
           <p:cNvSpPr/>
           <p:nvPr/>
         </p:nvSpPr>
@@ -24797,7 +24731,7 @@
       </p:sp>
       <p:sp>
         <p:nvSpPr>
-          <p:cNvPr id="120" name="Google Shape;120;p3"/>
+          <p:cNvPr id="119" name="Google Shape;119;p3"/>
           <p:cNvSpPr txBox="1"/>
           <p:nvPr/>
         </p:nvSpPr>
@@ -24863,7 +24797,7 @@
       </p:sp>
       <p:sp>
         <p:nvSpPr>
-          <p:cNvPr id="121" name="Google Shape;121;p3"/>
+          <p:cNvPr id="120" name="Google Shape;120;p3"/>
           <p:cNvSpPr txBox="1"/>
           <p:nvPr/>
         </p:nvSpPr>
@@ -24929,7 +24863,7 @@
       </p:sp>
       <p:sp>
         <p:nvSpPr>
-          <p:cNvPr id="122" name="Google Shape;122;p3"/>
+          <p:cNvPr id="121" name="Google Shape;121;p3"/>
           <p:cNvSpPr/>
           <p:nvPr/>
         </p:nvSpPr>
@@ -25003,7 +24937,7 @@
       </p:sp>
       <p:sp>
         <p:nvSpPr>
-          <p:cNvPr id="123" name="Google Shape;123;p3"/>
+          <p:cNvPr id="122" name="Google Shape;122;p3"/>
           <p:cNvSpPr txBox="1"/>
           <p:nvPr/>
         </p:nvSpPr>
@@ -25060,7 +24994,7 @@
       </p:sp>
       <p:sp>
         <p:nvSpPr>
-          <p:cNvPr id="124" name="Google Shape;124;p3"/>
+          <p:cNvPr id="123" name="Google Shape;123;p3"/>
           <p:cNvSpPr txBox="1"/>
           <p:nvPr/>
         </p:nvSpPr>
@@ -25126,7 +25060,7 @@
       </p:sp>
       <p:sp>
         <p:nvSpPr>
-          <p:cNvPr id="125" name="Google Shape;125;p3"/>
+          <p:cNvPr id="124" name="Google Shape;124;p3"/>
           <p:cNvSpPr txBox="1"/>
           <p:nvPr/>
         </p:nvSpPr>
@@ -25175,7 +25109,7 @@
       </p:sp>
       <p:sp>
         <p:nvSpPr>
-          <p:cNvPr id="126" name="Google Shape;126;p3"/>
+          <p:cNvPr id="125" name="Google Shape;125;p3"/>
           <p:cNvSpPr txBox="1"/>
           <p:nvPr/>
         </p:nvSpPr>
@@ -25660,7 +25594,7 @@
     </p:bg>
     <p:spTree>
       <p:nvGrpSpPr>
-        <p:cNvPr id="130" name="Shape 130"/>
+        <p:cNvPr id="129" name="Shape 129"/>
         <p:cNvGrpSpPr/>
         <p:nvPr/>
       </p:nvGrpSpPr>
@@ -25674,7 +25608,7 @@
       </p:grpSpPr>
       <p:sp>
         <p:nvSpPr>
-          <p:cNvPr id="131" name="Google Shape;131;p4"/>
+          <p:cNvPr id="130" name="Google Shape;130;p4"/>
           <p:cNvSpPr/>
           <p:nvPr/>
         </p:nvSpPr>
@@ -25740,7 +25674,7 @@
       </p:sp>
       <p:sp>
         <p:nvSpPr>
-          <p:cNvPr id="132" name="Google Shape;132;p4"/>
+          <p:cNvPr id="131" name="Google Shape;131;p4"/>
           <p:cNvSpPr/>
           <p:nvPr/>
         </p:nvSpPr>
@@ -25806,7 +25740,7 @@
       </p:sp>
       <p:sp>
         <p:nvSpPr>
-          <p:cNvPr id="133" name="Google Shape;133;p4"/>
+          <p:cNvPr id="132" name="Google Shape;132;p4"/>
           <p:cNvSpPr/>
           <p:nvPr/>
         </p:nvSpPr>
@@ -25872,7 +25806,7 @@
       </p:sp>
       <p:sp>
         <p:nvSpPr>
-          <p:cNvPr id="134" name="Google Shape;134;p4"/>
+          <p:cNvPr id="133" name="Google Shape;133;p4"/>
           <p:cNvSpPr/>
           <p:nvPr/>
         </p:nvSpPr>
@@ -25949,7 +25883,7 @@
       </p:sp>
       <p:sp>
         <p:nvSpPr>
-          <p:cNvPr id="135" name="Google Shape;135;p4"/>
+          <p:cNvPr id="134" name="Google Shape;134;p4"/>
           <p:cNvSpPr txBox="1"/>
           <p:nvPr/>
         </p:nvSpPr>
@@ -26015,7 +25949,7 @@
       </p:sp>
       <p:sp>
         <p:nvSpPr>
-          <p:cNvPr id="136" name="Google Shape;136;p4"/>
+          <p:cNvPr id="135" name="Google Shape;135;p4"/>
           <p:cNvSpPr txBox="1"/>
           <p:nvPr/>
         </p:nvSpPr>
@@ -26081,7 +26015,7 @@
       </p:sp>
       <p:sp>
         <p:nvSpPr>
-          <p:cNvPr id="137" name="Google Shape;137;p4"/>
+          <p:cNvPr id="136" name="Google Shape;136;p4"/>
           <p:cNvSpPr/>
           <p:nvPr/>
         </p:nvSpPr>
@@ -26155,7 +26089,7 @@
       </p:sp>
       <p:sp>
         <p:nvSpPr>
-          <p:cNvPr id="138" name="Google Shape;138;p4"/>
+          <p:cNvPr id="137" name="Google Shape;137;p4"/>
           <p:cNvSpPr/>
           <p:nvPr/>
         </p:nvSpPr>
@@ -26229,7 +26163,7 @@
       </p:sp>
       <p:sp>
         <p:nvSpPr>
-          <p:cNvPr id="139" name="Google Shape;139;p4"/>
+          <p:cNvPr id="138" name="Google Shape;138;p4"/>
           <p:cNvSpPr/>
           <p:nvPr/>
         </p:nvSpPr>
@@ -26295,7 +26229,7 @@
       </p:sp>
       <p:sp>
         <p:nvSpPr>
-          <p:cNvPr id="140" name="Google Shape;140;p4"/>
+          <p:cNvPr id="139" name="Google Shape;139;p4"/>
           <p:cNvSpPr txBox="1"/>
           <p:nvPr/>
         </p:nvSpPr>
@@ -26603,7 +26537,7 @@
       </p:sp>
       <p:sp>
         <p:nvSpPr>
-          <p:cNvPr id="141" name="Google Shape;141;p4"/>
+          <p:cNvPr id="140" name="Google Shape;140;p4"/>
           <p:cNvSpPr txBox="1"/>
           <p:nvPr/>
         </p:nvSpPr>
@@ -26820,7 +26754,7 @@
       </p:sp>
       <p:sp>
         <p:nvSpPr>
-          <p:cNvPr id="142" name="Google Shape;142;p4"/>
+          <p:cNvPr id="141" name="Google Shape;141;p4"/>
           <p:cNvSpPr txBox="1"/>
           <p:nvPr/>
         </p:nvSpPr>
@@ -26904,7 +26838,7 @@
     </p:bg>
     <p:spTree>
       <p:nvGrpSpPr>
-        <p:cNvPr id="146" name="Shape 146"/>
+        <p:cNvPr id="145" name="Shape 145"/>
         <p:cNvGrpSpPr/>
         <p:nvPr/>
       </p:nvGrpSpPr>
@@ -26918,7 +26852,7 @@
       </p:grpSpPr>
       <p:sp>
         <p:nvSpPr>
-          <p:cNvPr id="147" name="Google Shape;147;p5"/>
+          <p:cNvPr id="146" name="Google Shape;146;p5"/>
           <p:cNvSpPr/>
           <p:nvPr/>
         </p:nvSpPr>
@@ -26984,7 +26918,7 @@
       </p:sp>
       <p:sp>
         <p:nvSpPr>
-          <p:cNvPr id="148" name="Google Shape;148;p5"/>
+          <p:cNvPr id="147" name="Google Shape;147;p5"/>
           <p:cNvSpPr/>
           <p:nvPr/>
         </p:nvSpPr>
@@ -27050,7 +26984,7 @@
       </p:sp>
       <p:sp>
         <p:nvSpPr>
-          <p:cNvPr id="149" name="Google Shape;149;p5"/>
+          <p:cNvPr id="148" name="Google Shape;148;p5"/>
           <p:cNvSpPr/>
           <p:nvPr/>
         </p:nvSpPr>
@@ -27116,7 +27050,7 @@
       </p:sp>
       <p:sp>
         <p:nvSpPr>
-          <p:cNvPr id="150" name="Google Shape;150;p5"/>
+          <p:cNvPr id="149" name="Google Shape;149;p5"/>
           <p:cNvSpPr/>
           <p:nvPr/>
         </p:nvSpPr>
@@ -27193,7 +27127,7 @@
       </p:sp>
       <p:sp>
         <p:nvSpPr>
-          <p:cNvPr id="151" name="Google Shape;151;p5"/>
+          <p:cNvPr id="150" name="Google Shape;150;p5"/>
           <p:cNvSpPr txBox="1"/>
           <p:nvPr/>
         </p:nvSpPr>
@@ -27259,7 +27193,7 @@
       </p:sp>
       <p:sp>
         <p:nvSpPr>
-          <p:cNvPr id="152" name="Google Shape;152;p5"/>
+          <p:cNvPr id="151" name="Google Shape;151;p5"/>
           <p:cNvSpPr txBox="1"/>
           <p:nvPr/>
         </p:nvSpPr>
@@ -27325,7 +27259,7 @@
       </p:sp>
       <p:sp>
         <p:nvSpPr>
-          <p:cNvPr id="153" name="Google Shape;153;p5"/>
+          <p:cNvPr id="152" name="Google Shape;152;p5"/>
           <p:cNvSpPr/>
           <p:nvPr/>
         </p:nvSpPr>
@@ -27399,7 +27333,7 @@
       </p:sp>
       <p:sp>
         <p:nvSpPr>
-          <p:cNvPr id="154" name="Google Shape;154;p5"/>
+          <p:cNvPr id="153" name="Google Shape;153;p5"/>
           <p:cNvSpPr/>
           <p:nvPr/>
         </p:nvSpPr>
@@ -27473,7 +27407,7 @@
       </p:sp>
       <p:sp>
         <p:nvSpPr>
-          <p:cNvPr id="155" name="Google Shape;155;p5"/>
+          <p:cNvPr id="154" name="Google Shape;154;p5"/>
           <p:cNvSpPr/>
           <p:nvPr/>
         </p:nvSpPr>
@@ -27539,7 +27473,7 @@
       </p:sp>
       <p:sp>
         <p:nvSpPr>
-          <p:cNvPr id="156" name="Google Shape;156;p5"/>
+          <p:cNvPr id="155" name="Google Shape;155;p5"/>
           <p:cNvSpPr txBox="1"/>
           <p:nvPr/>
         </p:nvSpPr>
@@ -27753,7 +27687,7 @@
       </p:sp>
       <p:sp>
         <p:nvSpPr>
-          <p:cNvPr id="157" name="Google Shape;157;p5"/>
+          <p:cNvPr id="156" name="Google Shape;156;p5"/>
           <p:cNvSpPr txBox="1"/>
           <p:nvPr/>
         </p:nvSpPr>
@@ -27970,7 +27904,7 @@
       </p:sp>
       <p:sp>
         <p:nvSpPr>
-          <p:cNvPr id="158" name="Google Shape;158;p5"/>
+          <p:cNvPr id="157" name="Google Shape;157;p5"/>
           <p:cNvSpPr txBox="1"/>
           <p:nvPr/>
         </p:nvSpPr>
@@ -28054,7 +27988,7 @@
     </p:bg>
     <p:spTree>
       <p:nvGrpSpPr>
-        <p:cNvPr id="162" name="Shape 162"/>
+        <p:cNvPr id="161" name="Shape 161"/>
         <p:cNvGrpSpPr/>
         <p:nvPr/>
       </p:nvGrpSpPr>
@@ -28068,7 +28002,7 @@
       </p:grpSpPr>
       <p:sp>
         <p:nvSpPr>
-          <p:cNvPr id="163" name="Google Shape;163;p6"/>
+          <p:cNvPr id="162" name="Google Shape;162;p6"/>
           <p:cNvSpPr/>
           <p:nvPr/>
         </p:nvSpPr>
@@ -28134,7 +28068,7 @@
       </p:sp>
       <p:sp>
         <p:nvSpPr>
-          <p:cNvPr id="164" name="Google Shape;164;p6"/>
+          <p:cNvPr id="163" name="Google Shape;163;p6"/>
           <p:cNvSpPr/>
           <p:nvPr/>
         </p:nvSpPr>
@@ -28200,7 +28134,7 @@
       </p:sp>
       <p:sp>
         <p:nvSpPr>
-          <p:cNvPr id="165" name="Google Shape;165;p6"/>
+          <p:cNvPr id="164" name="Google Shape;164;p6"/>
           <p:cNvSpPr/>
           <p:nvPr/>
         </p:nvSpPr>
@@ -28266,7 +28200,7 @@
       </p:sp>
       <p:sp>
         <p:nvSpPr>
-          <p:cNvPr id="166" name="Google Shape;166;p6"/>
+          <p:cNvPr id="165" name="Google Shape;165;p6"/>
           <p:cNvSpPr/>
           <p:nvPr/>
         </p:nvSpPr>
@@ -28343,7 +28277,7 @@
       </p:sp>
       <p:sp>
         <p:nvSpPr>
-          <p:cNvPr id="167" name="Google Shape;167;p6"/>
+          <p:cNvPr id="166" name="Google Shape;166;p6"/>
           <p:cNvSpPr txBox="1"/>
           <p:nvPr/>
         </p:nvSpPr>
@@ -28409,7 +28343,7 @@
       </p:sp>
       <p:sp>
         <p:nvSpPr>
-          <p:cNvPr id="168" name="Google Shape;168;p6"/>
+          <p:cNvPr id="167" name="Google Shape;167;p6"/>
           <p:cNvSpPr txBox="1"/>
           <p:nvPr/>
         </p:nvSpPr>
@@ -28475,7 +28409,7 @@
       </p:sp>
       <p:sp>
         <p:nvSpPr>
-          <p:cNvPr id="169" name="Google Shape;169;p6"/>
+          <p:cNvPr id="168" name="Google Shape;168;p6"/>
           <p:cNvSpPr/>
           <p:nvPr/>
         </p:nvSpPr>
@@ -28549,7 +28483,7 @@
       </p:sp>
       <p:sp>
         <p:nvSpPr>
-          <p:cNvPr id="170" name="Google Shape;170;p6"/>
+          <p:cNvPr id="169" name="Google Shape;169;p6"/>
           <p:cNvSpPr txBox="1"/>
           <p:nvPr/>
         </p:nvSpPr>
@@ -28615,7 +28549,7 @@
       </p:sp>
       <p:graphicFrame>
         <p:nvGraphicFramePr>
-          <p:cNvPr id="171" name="Google Shape;171;p6"/>
+          <p:cNvPr id="170" name="Google Shape;170;p6"/>
           <p:cNvGraphicFramePr/>
           <p:nvPr/>
         </p:nvGraphicFramePr>
@@ -28628,7 +28562,7 @@
             <a:tbl>
               <a:tblPr>
                 <a:noFill/>
-                <a:tableStyleId>{E6D533FE-FD2F-4370-B4F4-59EF0C205012}</a:tableStyleId>
+                <a:tableStyleId>{3D4FFB22-3C65-4DAF-B08D-F1B4F6C1D308}</a:tableStyleId>
               </a:tblPr>
               <a:tblGrid>
                 <a:gridCol w="1645000"/>
@@ -29336,7 +29270,7 @@
     </p:bg>
     <p:spTree>
       <p:nvGrpSpPr>
-        <p:cNvPr id="175" name="Shape 175"/>
+        <p:cNvPr id="174" name="Shape 174"/>
         <p:cNvGrpSpPr/>
         <p:nvPr/>
       </p:nvGrpSpPr>
@@ -29350,7 +29284,7 @@
       </p:grpSpPr>
       <p:sp>
         <p:nvSpPr>
-          <p:cNvPr id="176" name="Google Shape;176;p7"/>
+          <p:cNvPr id="175" name="Google Shape;175;p7"/>
           <p:cNvSpPr/>
           <p:nvPr/>
         </p:nvSpPr>
@@ -29416,7 +29350,7 @@
       </p:sp>
       <p:sp>
         <p:nvSpPr>
-          <p:cNvPr id="177" name="Google Shape;177;p7"/>
+          <p:cNvPr id="176" name="Google Shape;176;p7"/>
           <p:cNvSpPr/>
           <p:nvPr/>
         </p:nvSpPr>
@@ -29482,7 +29416,7 @@
       </p:sp>
       <p:sp>
         <p:nvSpPr>
-          <p:cNvPr id="178" name="Google Shape;178;p7"/>
+          <p:cNvPr id="177" name="Google Shape;177;p7"/>
           <p:cNvSpPr/>
           <p:nvPr/>
         </p:nvSpPr>
@@ -29548,7 +29482,7 @@
       </p:sp>
       <p:sp>
         <p:nvSpPr>
-          <p:cNvPr id="179" name="Google Shape;179;p7"/>
+          <p:cNvPr id="178" name="Google Shape;178;p7"/>
           <p:cNvSpPr/>
           <p:nvPr/>
         </p:nvSpPr>
@@ -29625,7 +29559,7 @@
       </p:sp>
       <p:sp>
         <p:nvSpPr>
-          <p:cNvPr id="180" name="Google Shape;180;p7"/>
+          <p:cNvPr id="179" name="Google Shape;179;p7"/>
           <p:cNvSpPr txBox="1"/>
           <p:nvPr/>
         </p:nvSpPr>
@@ -29691,7 +29625,7 @@
       </p:sp>
       <p:sp>
         <p:nvSpPr>
-          <p:cNvPr id="181" name="Google Shape;181;p7"/>
+          <p:cNvPr id="180" name="Google Shape;180;p7"/>
           <p:cNvSpPr txBox="1"/>
           <p:nvPr/>
         </p:nvSpPr>
@@ -29757,7 +29691,7 @@
       </p:sp>
       <p:pic>
         <p:nvPicPr>
-          <p:cNvPr id="182" name="Google Shape;182;p7"/>
+          <p:cNvPr id="181" name="Google Shape;181;p7"/>
           <p:cNvPicPr preferRelativeResize="0"/>
           <p:nvPr/>
         </p:nvPicPr>
@@ -29772,7 +29706,7 @@
         <p:spPr>
           <a:xfrm>
             <a:off x="1341120" y="1249680"/>
-            <a:ext cx="6324600" cy="3611880"/>
+            <a:ext cx="6324602" cy="3614058"/>
           </a:xfrm>
           <a:prstGeom prst="rect">
             <a:avLst/>
@@ -29803,7 +29737,7 @@
     </p:bg>
     <p:spTree>
       <p:nvGrpSpPr>
-        <p:cNvPr id="186" name="Shape 186"/>
+        <p:cNvPr id="185" name="Shape 185"/>
         <p:cNvGrpSpPr/>
         <p:nvPr/>
       </p:nvGrpSpPr>
@@ -29817,7 +29751,7 @@
       </p:grpSpPr>
       <p:sp>
         <p:nvSpPr>
-          <p:cNvPr id="187" name="Google Shape;187;p8"/>
+          <p:cNvPr id="186" name="Google Shape;186;p8"/>
           <p:cNvSpPr/>
           <p:nvPr/>
         </p:nvSpPr>
@@ -29883,7 +29817,7 @@
       </p:sp>
       <p:sp>
         <p:nvSpPr>
-          <p:cNvPr id="188" name="Google Shape;188;p8"/>
+          <p:cNvPr id="187" name="Google Shape;187;p8"/>
           <p:cNvSpPr/>
           <p:nvPr/>
         </p:nvSpPr>
@@ -29949,7 +29883,7 @@
       </p:sp>
       <p:sp>
         <p:nvSpPr>
-          <p:cNvPr id="189" name="Google Shape;189;p8"/>
+          <p:cNvPr id="188" name="Google Shape;188;p8"/>
           <p:cNvSpPr/>
           <p:nvPr/>
         </p:nvSpPr>
@@ -30015,7 +29949,7 @@
       </p:sp>
       <p:sp>
         <p:nvSpPr>
-          <p:cNvPr id="190" name="Google Shape;190;p8"/>
+          <p:cNvPr id="189" name="Google Shape;189;p8"/>
           <p:cNvSpPr/>
           <p:nvPr/>
         </p:nvSpPr>
@@ -30092,7 +30026,7 @@
       </p:sp>
       <p:sp>
         <p:nvSpPr>
-          <p:cNvPr id="191" name="Google Shape;191;p8"/>
+          <p:cNvPr id="190" name="Google Shape;190;p8"/>
           <p:cNvSpPr txBox="1"/>
           <p:nvPr/>
         </p:nvSpPr>
@@ -30158,7 +30092,7 @@
       </p:sp>
       <p:sp>
         <p:nvSpPr>
-          <p:cNvPr id="192" name="Google Shape;192;p8"/>
+          <p:cNvPr id="191" name="Google Shape;191;p8"/>
           <p:cNvSpPr txBox="1"/>
           <p:nvPr/>
         </p:nvSpPr>
@@ -30224,7 +30158,7 @@
       </p:sp>
       <p:sp>
         <p:nvSpPr>
-          <p:cNvPr id="193" name="Google Shape;193;p8"/>
+          <p:cNvPr id="192" name="Google Shape;192;p8"/>
           <p:cNvSpPr/>
           <p:nvPr/>
         </p:nvSpPr>
@@ -30298,7 +30232,7 @@
       </p:sp>
       <p:sp>
         <p:nvSpPr>
-          <p:cNvPr id="194" name="Google Shape;194;p8"/>
+          <p:cNvPr id="193" name="Google Shape;193;p8"/>
           <p:cNvSpPr/>
           <p:nvPr/>
         </p:nvSpPr>
@@ -30372,7 +30306,7 @@
       </p:sp>
       <p:sp>
         <p:nvSpPr>
-          <p:cNvPr id="195" name="Google Shape;195;p8"/>
+          <p:cNvPr id="194" name="Google Shape;194;p8"/>
           <p:cNvSpPr/>
           <p:nvPr/>
         </p:nvSpPr>
@@ -30438,7 +30372,7 @@
       </p:sp>
       <p:sp>
         <p:nvSpPr>
-          <p:cNvPr id="196" name="Google Shape;196;p8"/>
+          <p:cNvPr id="195" name="Google Shape;195;p8"/>
           <p:cNvSpPr txBox="1"/>
           <p:nvPr/>
         </p:nvSpPr>
@@ -30504,7 +30438,7 @@
       </p:sp>
       <p:sp>
         <p:nvSpPr>
-          <p:cNvPr id="197" name="Google Shape;197;p8"/>
+          <p:cNvPr id="196" name="Google Shape;196;p8"/>
           <p:cNvSpPr/>
           <p:nvPr/>
         </p:nvSpPr>
@@ -31059,7 +30993,7 @@
       </p:sp>
       <p:sp>
         <p:nvSpPr>
-          <p:cNvPr id="198" name="Google Shape;198;p8"/>
+          <p:cNvPr id="197" name="Google Shape;197;p8"/>
           <p:cNvSpPr txBox="1"/>
           <p:nvPr/>
         </p:nvSpPr>
@@ -31125,7 +31059,7 @@
       </p:sp>
       <p:sp>
         <p:nvSpPr>
-          <p:cNvPr id="199" name="Google Shape;199;p8"/>
+          <p:cNvPr id="198" name="Google Shape;198;p8"/>
           <p:cNvSpPr txBox="1"/>
           <p:nvPr/>
         </p:nvSpPr>
@@ -31348,7 +31282,7 @@
     </p:bg>
     <p:spTree>
       <p:nvGrpSpPr>
-        <p:cNvPr id="203" name="Shape 203"/>
+        <p:cNvPr id="202" name="Shape 202"/>
         <p:cNvGrpSpPr/>
         <p:nvPr/>
       </p:nvGrpSpPr>
@@ -31362,7 +31296,7 @@
       </p:grpSpPr>
       <p:sp>
         <p:nvSpPr>
-          <p:cNvPr id="204" name="Google Shape;204;p9"/>
+          <p:cNvPr id="203" name="Google Shape;203;p9"/>
           <p:cNvSpPr/>
           <p:nvPr/>
         </p:nvSpPr>
@@ -31428,7 +31362,7 @@
       </p:sp>
       <p:sp>
         <p:nvSpPr>
-          <p:cNvPr id="205" name="Google Shape;205;p9"/>
+          <p:cNvPr id="204" name="Google Shape;204;p9"/>
           <p:cNvSpPr/>
           <p:nvPr/>
         </p:nvSpPr>
@@ -31494,7 +31428,7 @@
       </p:sp>
       <p:sp>
         <p:nvSpPr>
-          <p:cNvPr id="206" name="Google Shape;206;p9"/>
+          <p:cNvPr id="205" name="Google Shape;205;p9"/>
           <p:cNvSpPr/>
           <p:nvPr/>
         </p:nvSpPr>
@@ -31560,7 +31494,7 @@
       </p:sp>
       <p:sp>
         <p:nvSpPr>
-          <p:cNvPr id="207" name="Google Shape;207;p9"/>
+          <p:cNvPr id="206" name="Google Shape;206;p9"/>
           <p:cNvSpPr/>
           <p:nvPr/>
         </p:nvSpPr>
@@ -31637,7 +31571,7 @@
       </p:sp>
       <p:sp>
         <p:nvSpPr>
-          <p:cNvPr id="208" name="Google Shape;208;p9"/>
+          <p:cNvPr id="207" name="Google Shape;207;p9"/>
           <p:cNvSpPr txBox="1"/>
           <p:nvPr/>
         </p:nvSpPr>
@@ -31703,7 +31637,7 @@
       </p:sp>
       <p:sp>
         <p:nvSpPr>
-          <p:cNvPr id="209" name="Google Shape;209;p9"/>
+          <p:cNvPr id="208" name="Google Shape;208;p9"/>
           <p:cNvSpPr txBox="1"/>
           <p:nvPr/>
         </p:nvSpPr>
@@ -31769,7 +31703,7 @@
       </p:sp>
       <p:sp>
         <p:nvSpPr>
-          <p:cNvPr id="210" name="Google Shape;210;p9"/>
+          <p:cNvPr id="209" name="Google Shape;209;p9"/>
           <p:cNvSpPr/>
           <p:nvPr/>
         </p:nvSpPr>
@@ -31843,7 +31777,7 @@
       </p:sp>
       <p:sp>
         <p:nvSpPr>
-          <p:cNvPr id="211" name="Google Shape;211;p9"/>
+          <p:cNvPr id="210" name="Google Shape;210;p9"/>
           <p:cNvSpPr/>
           <p:nvPr/>
         </p:nvSpPr>
@@ -31917,7 +31851,7 @@
       </p:sp>
       <p:sp>
         <p:nvSpPr>
-          <p:cNvPr id="212" name="Google Shape;212;p9"/>
+          <p:cNvPr id="211" name="Google Shape;211;p9"/>
           <p:cNvSpPr/>
           <p:nvPr/>
         </p:nvSpPr>
@@ -31983,7 +31917,7 @@
       </p:sp>
       <p:sp>
         <p:nvSpPr>
-          <p:cNvPr id="213" name="Google Shape;213;p9"/>
+          <p:cNvPr id="212" name="Google Shape;212;p9"/>
           <p:cNvSpPr txBox="1"/>
           <p:nvPr/>
         </p:nvSpPr>
@@ -32068,7 +32002,7 @@
       </p:sp>
       <p:sp>
         <p:nvSpPr>
-          <p:cNvPr id="214" name="Google Shape;214;p9"/>
+          <p:cNvPr id="213" name="Google Shape;213;p9"/>
           <p:cNvSpPr txBox="1"/>
           <p:nvPr/>
         </p:nvSpPr>
@@ -32258,7 +32192,7 @@
       </p:sp>
       <p:sp>
         <p:nvSpPr>
-          <p:cNvPr id="215" name="Google Shape;215;p9"/>
+          <p:cNvPr id="214" name="Google Shape;214;p9"/>
           <p:cNvSpPr txBox="1"/>
           <p:nvPr/>
         </p:nvSpPr>
@@ -32324,7 +32258,7 @@
       </p:sp>
       <p:graphicFrame>
         <p:nvGraphicFramePr>
-          <p:cNvPr id="216" name="Google Shape;216;p9"/>
+          <p:cNvPr id="215" name="Google Shape;215;p9"/>
           <p:cNvGraphicFramePr/>
           <p:nvPr/>
         </p:nvGraphicFramePr>
@@ -32337,7 +32271,7 @@
             <a:tbl>
               <a:tblPr>
                 <a:noFill/>
-                <a:tableStyleId>{E6D533FE-FD2F-4370-B4F4-59EF0C205012}</a:tableStyleId>
+                <a:tableStyleId>{3D4FFB22-3C65-4DAF-B08D-F1B4F6C1D308}</a:tableStyleId>
               </a:tblPr>
               <a:tblGrid>
                 <a:gridCol w="2476800"/>
@@ -32479,7 +32413,7 @@
                       </a:pPr>
                       <a:r>
                         <a:rPr lang="en-US"/>
-                        <a:t>Analytical storage </a:t>
+                        <a:t>Analytical storage</a:t>
                       </a:r>
                       <a:endParaRPr/>
                     </a:p>
@@ -32527,7 +32461,7 @@
                       </a:pPr>
                       <a:r>
                         <a:rPr lang="en-US"/>
-                        <a:t>Fast OLAP querying </a:t>
+                        <a:t>Fast OLAP querying, storage </a:t>
                       </a:r>
                       <a:endParaRPr/>
                     </a:p>
